--- a/outputs/tutoring/tsukasa/school-slides/deck_part1.pptx
+++ b/outputs/tutoring/tsukasa/school-slides/deck_part1.pptx
@@ -3477,47 +3477,6 @@
           </a:p>
         </p:txBody>
       </p:sp>
-      <p:sp>
-        <p:nvSpPr>
-          <p:cNvPr id="11" name="TextBox 10"/>
-          <p:cNvSpPr txBox="1"/>
-          <p:nvPr/>
-        </p:nvSpPr>
-        <p:spPr>
-          <a:xfrm>
-            <a:off x="10972800" y="6492240"/>
-            <a:ext cx="1097280" cy="274320"/>
-          </a:xfrm>
-          <a:prstGeom prst="rect">
-            <a:avLst/>
-          </a:prstGeom>
-          <a:noFill/>
-        </p:spPr>
-        <p:txBody>
-          <a:bodyPr wrap="square" anchor="t" lIns="0" rIns="0" tIns="0" bIns="0">
-            <a:spAutoFit/>
-          </a:bodyPr>
-          <a:lstStyle/>
-          <a:p>
-            <a:pPr algn="r">
-              <a:lnSpc>
-                <a:spcPct val="115000"/>
-              </a:lnSpc>
-            </a:pPr>
-            <a:r>
-              <a:rPr sz="900" b="0">
-                <a:solidFill>
-                  <a:srgbClr val="8A96A8"/>
-                </a:solidFill>
-                <a:latin typeface="Hiragino Sans"/>
-                <a:ea typeface="Hiragino Sans"/>
-                <a:cs typeface="Hiragino Sans"/>
-              </a:rPr>
-              <a:t>pilot</a:t>
-            </a:r>
-          </a:p>
-        </p:txBody>
-      </p:sp>
     </p:spTree>
   </p:cSld>
   <p:clrMapOvr>
@@ -3538,7 +3497,7 @@
       <p:grpSpPr/>
       <p:pic>
         <p:nvPicPr>
-          <p:cNvPr id="2" name="Picture 1" descr="wiki_campus_hero.jpg"/>
+          <p:cNvPr id="2" name="Picture 1" descr="wiki_beach_hero.jpg"/>
           <p:cNvPicPr>
             <a:picLocks noChangeAspect="1"/>
           </p:cNvPicPr>
@@ -3546,7 +3505,7 @@
         </p:nvPicPr>
         <p:blipFill>
           <a:blip r:embed="rId2"/>
-          <a:srcRect t="7825" b="7825"/>
+          <a:srcRect t="7982" b="7982"/>
           <a:stretch>
             <a:fillRect/>
           </a:stretch>
@@ -3810,7 +3769,7 @@
                 <a:ea typeface="Hiragino Sans"/>
                 <a:cs typeface="Hiragino Sans"/>
               </a:rPr>
-              <a:t>海と江の島が見える、坂の上の学校</a:t>
+              <a:t>教室の窓の外が、海。</a:t>
             </a:r>
           </a:p>
         </p:txBody>
@@ -4003,272 +3962,14 @@
       </p:sp>
       <p:sp>
         <p:nvSpPr>
-          <p:cNvPr id="6" name="Oval 5"/>
+          <p:cNvPr id="6" name="Rounded Rectangle 5"/>
           <p:cNvSpPr/>
           <p:nvPr/>
         </p:nvSpPr>
         <p:spPr>
           <a:xfrm>
-            <a:off x="658368" y="1691640"/>
-            <a:ext cx="182880" cy="182880"/>
-          </a:xfrm>
-          <a:prstGeom prst="ellipse">
-            <a:avLst/>
-          </a:prstGeom>
-          <a:solidFill>
-            <a:srgbClr val="2E8FA3"/>
-          </a:solidFill>
-          <a:ln w="9525">
-            <a:solidFill>
-              <a:srgbClr val="2E8FA3"/>
-            </a:solidFill>
-          </a:ln>
-        </p:spPr>
-        <p:style>
-          <a:lnRef idx="1">
-            <a:schemeClr val="accent1"/>
-          </a:lnRef>
-          <a:fillRef idx="3">
-            <a:schemeClr val="accent1"/>
-          </a:fillRef>
-          <a:effectRef idx="2">
-            <a:schemeClr val="accent1"/>
-          </a:effectRef>
-          <a:fontRef idx="minor">
-            <a:schemeClr val="lt1"/>
-          </a:fontRef>
-        </p:style>
-        <p:txBody>
-          <a:bodyPr rtlCol="0" anchor="ctr"/>
-          <a:lstStyle/>
-          <a:p>
-            <a:pPr algn="ctr"/>
-          </a:p>
-        </p:txBody>
-      </p:sp>
-      <p:sp>
-        <p:nvSpPr>
-          <p:cNvPr id="7" name="TextBox 6"/>
-          <p:cNvSpPr txBox="1"/>
-          <p:nvPr/>
-        </p:nvSpPr>
-        <p:spPr>
-          <a:xfrm>
-            <a:off x="1170432" y="1572768"/>
-            <a:ext cx="5806440" cy="530352"/>
-          </a:xfrm>
-          <a:prstGeom prst="rect">
-            <a:avLst/>
-          </a:prstGeom>
-          <a:noFill/>
-        </p:spPr>
-        <p:txBody>
-          <a:bodyPr wrap="square" anchor="t" lIns="0" rIns="0" tIns="0" bIns="0">
-            <a:spAutoFit/>
-          </a:bodyPr>
-          <a:lstStyle/>
-          <a:p>
-            <a:pPr algn="l">
-              <a:lnSpc>
-                <a:spcPct val="118000"/>
-              </a:lnSpc>
-            </a:pPr>
-            <a:r>
-              <a:rPr sz="1800" b="1">
-                <a:solidFill>
-                  <a:srgbClr val="1A1A1A"/>
-                </a:solidFill>
-                <a:latin typeface="Hiragino Sans"/>
-                <a:ea typeface="Hiragino Sans"/>
-                <a:cs typeface="Hiragino Sans"/>
-              </a:rPr>
-              <a:t>教室から相模湾と江の島が一望できる、海沿いの立地</a:t>
-            </a:r>
-          </a:p>
-        </p:txBody>
-      </p:sp>
-      <p:sp>
-        <p:nvSpPr>
-          <p:cNvPr id="8" name="Oval 7"/>
-          <p:cNvSpPr/>
-          <p:nvPr/>
-        </p:nvSpPr>
-        <p:spPr>
-          <a:xfrm>
-            <a:off x="658368" y="2606040"/>
-            <a:ext cx="182880" cy="182880"/>
-          </a:xfrm>
-          <a:prstGeom prst="ellipse">
-            <a:avLst/>
-          </a:prstGeom>
-          <a:solidFill>
-            <a:srgbClr val="2E8FA3"/>
-          </a:solidFill>
-          <a:ln w="9525">
-            <a:solidFill>
-              <a:srgbClr val="2E8FA3"/>
-            </a:solidFill>
-          </a:ln>
-        </p:spPr>
-        <p:style>
-          <a:lnRef idx="1">
-            <a:schemeClr val="accent1"/>
-          </a:lnRef>
-          <a:fillRef idx="3">
-            <a:schemeClr val="accent1"/>
-          </a:fillRef>
-          <a:effectRef idx="2">
-            <a:schemeClr val="accent1"/>
-          </a:effectRef>
-          <a:fontRef idx="minor">
-            <a:schemeClr val="lt1"/>
-          </a:fontRef>
-        </p:style>
-        <p:txBody>
-          <a:bodyPr rtlCol="0" anchor="ctr"/>
-          <a:lstStyle/>
-          <a:p>
-            <a:pPr algn="ctr"/>
-          </a:p>
-        </p:txBody>
-      </p:sp>
-      <p:sp>
-        <p:nvSpPr>
-          <p:cNvPr id="9" name="TextBox 8"/>
-          <p:cNvSpPr txBox="1"/>
-          <p:nvPr/>
-        </p:nvSpPr>
-        <p:spPr>
-          <a:xfrm>
-            <a:off x="1170432" y="2487168"/>
-            <a:ext cx="5806440" cy="530352"/>
-          </a:xfrm>
-          <a:prstGeom prst="rect">
-            <a:avLst/>
-          </a:prstGeom>
-          <a:noFill/>
-        </p:spPr>
-        <p:txBody>
-          <a:bodyPr wrap="square" anchor="t" lIns="0" rIns="0" tIns="0" bIns="0">
-            <a:spAutoFit/>
-          </a:bodyPr>
-          <a:lstStyle/>
-          <a:p>
-            <a:pPr algn="l">
-              <a:lnSpc>
-                <a:spcPct val="118000"/>
-              </a:lnSpc>
-            </a:pPr>
-            <a:r>
-              <a:rPr sz="1800" b="1">
-                <a:solidFill>
-                  <a:srgbClr val="1A1A1A"/>
-                </a:solidFill>
-                <a:latin typeface="Hiragino Sans"/>
-                <a:ea typeface="Hiragino Sans"/>
-                <a:cs typeface="Hiragino Sans"/>
-              </a:rPr>
-              <a:t>校訓は「自学自習・自主自律」。自分で考えて動く自由な空気</a:t>
-            </a:r>
-          </a:p>
-        </p:txBody>
-      </p:sp>
-      <p:sp>
-        <p:nvSpPr>
-          <p:cNvPr id="10" name="Oval 9"/>
-          <p:cNvSpPr/>
-          <p:nvPr/>
-        </p:nvSpPr>
-        <p:spPr>
-          <a:xfrm>
-            <a:off x="658368" y="3520440"/>
-            <a:ext cx="182880" cy="182880"/>
-          </a:xfrm>
-          <a:prstGeom prst="ellipse">
-            <a:avLst/>
-          </a:prstGeom>
-          <a:solidFill>
-            <a:srgbClr val="2E8FA3"/>
-          </a:solidFill>
-          <a:ln w="9525">
-            <a:solidFill>
-              <a:srgbClr val="2E8FA3"/>
-            </a:solidFill>
-          </a:ln>
-        </p:spPr>
-        <p:style>
-          <a:lnRef idx="1">
-            <a:schemeClr val="accent1"/>
-          </a:lnRef>
-          <a:fillRef idx="3">
-            <a:schemeClr val="accent1"/>
-          </a:fillRef>
-          <a:effectRef idx="2">
-            <a:schemeClr val="accent1"/>
-          </a:effectRef>
-          <a:fontRef idx="minor">
-            <a:schemeClr val="lt1"/>
-          </a:fontRef>
-        </p:style>
-        <p:txBody>
-          <a:bodyPr rtlCol="0" anchor="ctr"/>
-          <a:lstStyle/>
-          <a:p>
-            <a:pPr algn="ctr"/>
-          </a:p>
-        </p:txBody>
-      </p:sp>
-      <p:sp>
-        <p:nvSpPr>
-          <p:cNvPr id="11" name="TextBox 10"/>
-          <p:cNvSpPr txBox="1"/>
-          <p:nvPr/>
-        </p:nvSpPr>
-        <p:spPr>
-          <a:xfrm>
-            <a:off x="1170432" y="3401568"/>
-            <a:ext cx="5806440" cy="530352"/>
-          </a:xfrm>
-          <a:prstGeom prst="rect">
-            <a:avLst/>
-          </a:prstGeom>
-          <a:noFill/>
-        </p:spPr>
-        <p:txBody>
-          <a:bodyPr wrap="square" anchor="t" lIns="0" rIns="0" tIns="0" bIns="0">
-            <a:spAutoFit/>
-          </a:bodyPr>
-          <a:lstStyle/>
-          <a:p>
-            <a:pPr algn="l">
-              <a:lnSpc>
-                <a:spcPct val="118000"/>
-              </a:lnSpc>
-            </a:pPr>
-            <a:r>
-              <a:rPr sz="1800" b="1">
-                <a:solidFill>
-                  <a:srgbClr val="1A1A1A"/>
-                </a:solidFill>
-                <a:latin typeface="Hiragino Sans"/>
-                <a:ea typeface="Hiragino Sans"/>
-                <a:cs typeface="Hiragino Sans"/>
-              </a:rPr>
-              <a:t>文化祭「七高祭」・体育祭「七里ンピック」は生徒が主役。野外ステージで盛り上がる行事も</a:t>
-            </a:r>
-          </a:p>
-        </p:txBody>
-      </p:sp>
-      <p:sp>
-        <p:nvSpPr>
-          <p:cNvPr id="12" name="Rounded Rectangle 11"/>
-          <p:cNvSpPr/>
-          <p:nvPr/>
-        </p:nvSpPr>
-        <p:spPr>
-          <a:xfrm>
-            <a:off x="658368" y="4709160"/>
-            <a:ext cx="6217920" cy="566928"/>
+            <a:off x="658368" y="1170432"/>
+            <a:ext cx="3456432" cy="1444752"/>
           </a:xfrm>
           <a:prstGeom prst="roundRect">
             <a:avLst>
@@ -4306,16 +4007,131 @@
           </a:p>
         </p:txBody>
       </p:sp>
-      <p:sp>
-        <p:nvSpPr>
-          <p:cNvPr id="13" name="TextBox 12"/>
+      <p:pic>
+        <p:nvPicPr>
+          <p:cNvPr id="7" name="Picture 6" descr="wiki_campus_hero.jpg"/>
+          <p:cNvPicPr>
+            <a:picLocks noChangeAspect="1"/>
+          </p:cNvPicPr>
+          <p:nvPr/>
+        </p:nvPicPr>
+        <p:blipFill>
+          <a:blip r:embed="rId2"/>
+          <a:srcRect t="20589" b="20589"/>
+          <a:stretch>
+            <a:fillRect/>
+          </a:stretch>
+        </p:blipFill>
+        <p:spPr>
+          <a:xfrm>
+            <a:off x="731520" y="1243584"/>
+            <a:ext cx="3310128" cy="1298448"/>
+          </a:xfrm>
+          <a:prstGeom prst="rect">
+            <a:avLst/>
+          </a:prstGeom>
+        </p:spPr>
+      </p:pic>
+      <p:sp>
+        <p:nvSpPr>
+          <p:cNvPr id="8" name="Rounded Rectangle 7"/>
+          <p:cNvSpPr/>
+          <p:nvPr/>
+        </p:nvSpPr>
+        <p:spPr>
+          <a:xfrm>
+            <a:off x="731520" y="1243584"/>
+            <a:ext cx="3310128" cy="1298448"/>
+          </a:xfrm>
+          <a:prstGeom prst="roundRect">
+            <a:avLst>
+              <a:gd name="adj" fmla="val 4000"/>
+            </a:avLst>
+          </a:prstGeom>
+          <a:noFill/>
+          <a:ln w="12700">
+            <a:solidFill>
+              <a:srgbClr val="FFFFFF"/>
+            </a:solidFill>
+          </a:ln>
+        </p:spPr>
+        <p:style>
+          <a:lnRef idx="1">
+            <a:schemeClr val="accent1"/>
+          </a:lnRef>
+          <a:fillRef idx="3">
+            <a:schemeClr val="accent1"/>
+          </a:fillRef>
+          <a:effectRef idx="2">
+            <a:schemeClr val="accent1"/>
+          </a:effectRef>
+          <a:fontRef idx="minor">
+            <a:schemeClr val="lt1"/>
+          </a:fontRef>
+        </p:style>
+        <p:txBody>
+          <a:bodyPr rtlCol="0" anchor="ctr"/>
+          <a:lstStyle/>
+          <a:p>
+            <a:pPr algn="ctr"/>
+          </a:p>
+        </p:txBody>
+      </p:sp>
+      <p:sp>
+        <p:nvSpPr>
+          <p:cNvPr id="9" name="Rounded Rectangle 8"/>
+          <p:cNvSpPr/>
+          <p:nvPr/>
+        </p:nvSpPr>
+        <p:spPr>
+          <a:xfrm>
+            <a:off x="731520" y="2212848"/>
+            <a:ext cx="3310128" cy="329184"/>
+          </a:xfrm>
+          <a:prstGeom prst="roundRect">
+            <a:avLst>
+              <a:gd name="adj" fmla="val 6000"/>
+            </a:avLst>
+          </a:prstGeom>
+          <a:solidFill>
+            <a:srgbClr val="0A162A"/>
+          </a:solidFill>
+          <a:ln>
+            <a:noFill/>
+          </a:ln>
+        </p:spPr>
+        <p:style>
+          <a:lnRef idx="1">
+            <a:schemeClr val="accent1"/>
+          </a:lnRef>
+          <a:fillRef idx="3">
+            <a:schemeClr val="accent1"/>
+          </a:fillRef>
+          <a:effectRef idx="2">
+            <a:schemeClr val="accent1"/>
+          </a:effectRef>
+          <a:fontRef idx="minor">
+            <a:schemeClr val="lt1"/>
+          </a:fontRef>
+        </p:style>
+        <p:txBody>
+          <a:bodyPr rtlCol="0" anchor="ctr"/>
+          <a:lstStyle/>
+          <a:p>
+            <a:pPr algn="ctr"/>
+          </a:p>
+        </p:txBody>
+      </p:sp>
+      <p:sp>
+        <p:nvSpPr>
+          <p:cNvPr id="10" name="TextBox 9"/>
           <p:cNvSpPr txBox="1"/>
           <p:nvPr/>
         </p:nvSpPr>
         <p:spPr>
           <a:xfrm>
-            <a:off x="932688" y="4882896"/>
-            <a:ext cx="5669280" cy="219456"/>
+            <a:off x="859536" y="2267712"/>
+            <a:ext cx="3054096" cy="219456"/>
           </a:xfrm>
           <a:prstGeom prst="rect">
             <a:avLst/>
@@ -4334,29 +4150,29 @@
               </a:lnSpc>
             </a:pPr>
             <a:r>
-              <a:rPr sz="1500" b="1">
+              <a:rPr sz="900" b="1">
                 <a:solidFill>
-                  <a:srgbClr val="1E6575"/>
+                  <a:srgbClr val="FFFFFF"/>
                 </a:solidFill>
                 <a:latin typeface="Hiragino Sans"/>
                 <a:ea typeface="Hiragino Sans"/>
                 <a:cs typeface="Hiragino Sans"/>
               </a:rPr>
-              <a:t>江ノ電「七里ヶ浜」駅から徒歩すぐ</a:t>
-            </a:r>
-          </a:p>
-        </p:txBody>
-      </p:sp>
-      <p:sp>
-        <p:nvSpPr>
-          <p:cNvPr id="14" name="Rounded Rectangle 13"/>
+              <a:t>校舎</a:t>
+            </a:r>
+          </a:p>
+        </p:txBody>
+      </p:sp>
+      <p:sp>
+        <p:nvSpPr>
+          <p:cNvPr id="11" name="Rounded Rectangle 10"/>
           <p:cNvSpPr/>
           <p:nvPr/>
         </p:nvSpPr>
         <p:spPr>
           <a:xfrm>
-            <a:off x="7360920" y="1389888"/>
-            <a:ext cx="4224528" cy="2487168"/>
+            <a:off x="4334256" y="1170432"/>
+            <a:ext cx="3456432" cy="1444752"/>
           </a:xfrm>
           <a:prstGeom prst="roundRect">
             <a:avLst>
@@ -4396,23 +4212,23 @@
       </p:sp>
       <p:pic>
         <p:nvPicPr>
-          <p:cNvPr id="15" name="Picture 14" descr="shichirinpic_card.jpg"/>
+          <p:cNvPr id="12" name="Picture 11" descr="wiki_enoden_card.jpg"/>
           <p:cNvPicPr>
             <a:picLocks noChangeAspect="1"/>
           </p:cNvPicPr>
           <p:nvPr/>
         </p:nvPicPr>
         <p:blipFill>
-          <a:blip r:embed="rId2"/>
-          <a:srcRect l="8580" r="8580"/>
+          <a:blip r:embed="rId3"/>
+          <a:srcRect l="34" r="34"/>
           <a:stretch>
             <a:fillRect/>
           </a:stretch>
         </p:blipFill>
         <p:spPr>
           <a:xfrm>
-            <a:off x="7434072" y="1463040"/>
-            <a:ext cx="4078224" cy="2340864"/>
+            <a:off x="4407408" y="1243584"/>
+            <a:ext cx="3310128" cy="1298448"/>
           </a:xfrm>
           <a:prstGeom prst="rect">
             <a:avLst/>
@@ -4421,14 +4237,14 @@
       </p:pic>
       <p:sp>
         <p:nvSpPr>
-          <p:cNvPr id="16" name="Rounded Rectangle 15"/>
+          <p:cNvPr id="13" name="Rounded Rectangle 12"/>
           <p:cNvSpPr/>
           <p:nvPr/>
         </p:nvSpPr>
         <p:spPr>
           <a:xfrm>
-            <a:off x="7434072" y="1463040"/>
-            <a:ext cx="4078224" cy="2340864"/>
+            <a:off x="4407408" y="1243584"/>
+            <a:ext cx="3310128" cy="1298448"/>
           </a:xfrm>
           <a:prstGeom prst="roundRect">
             <a:avLst>
@@ -4466,14 +4282,14 @@
       </p:sp>
       <p:sp>
         <p:nvSpPr>
-          <p:cNvPr id="17" name="Rounded Rectangle 16"/>
+          <p:cNvPr id="14" name="Rounded Rectangle 13"/>
           <p:cNvSpPr/>
           <p:nvPr/>
         </p:nvSpPr>
         <p:spPr>
           <a:xfrm>
-            <a:off x="7434072" y="3474720"/>
-            <a:ext cx="4078224" cy="329184"/>
+            <a:off x="4407408" y="2212848"/>
+            <a:ext cx="3310128" cy="329184"/>
           </a:xfrm>
           <a:prstGeom prst="roundRect">
             <a:avLst>
@@ -4511,14 +4327,217 @@
       </p:sp>
       <p:sp>
         <p:nvSpPr>
-          <p:cNvPr id="18" name="TextBox 17"/>
+          <p:cNvPr id="15" name="TextBox 14"/>
           <p:cNvSpPr txBox="1"/>
           <p:nvPr/>
         </p:nvSpPr>
         <p:spPr>
           <a:xfrm>
-            <a:off x="7562088" y="3529584"/>
-            <a:ext cx="3822192" cy="219456"/>
+            <a:off x="4535424" y="2267712"/>
+            <a:ext cx="3054096" cy="219456"/>
+          </a:xfrm>
+          <a:prstGeom prst="rect">
+            <a:avLst/>
+          </a:prstGeom>
+          <a:noFill/>
+        </p:spPr>
+        <p:txBody>
+          <a:bodyPr wrap="square" anchor="ctr" lIns="0" rIns="0" tIns="0" bIns="0">
+            <a:spAutoFit/>
+          </a:bodyPr>
+          <a:lstStyle/>
+          <a:p>
+            <a:pPr algn="l">
+              <a:lnSpc>
+                <a:spcPct val="115000"/>
+              </a:lnSpc>
+            </a:pPr>
+            <a:r>
+              <a:rPr sz="900" b="1">
+                <a:solidFill>
+                  <a:srgbClr val="FFFFFF"/>
+                </a:solidFill>
+                <a:latin typeface="Hiragino Sans"/>
+                <a:ea typeface="Hiragino Sans"/>
+                <a:cs typeface="Hiragino Sans"/>
+              </a:rPr>
+              <a:t>江ノ電で通学</a:t>
+            </a:r>
+          </a:p>
+        </p:txBody>
+      </p:sp>
+      <p:sp>
+        <p:nvSpPr>
+          <p:cNvPr id="16" name="Rounded Rectangle 15"/>
+          <p:cNvSpPr/>
+          <p:nvPr/>
+        </p:nvSpPr>
+        <p:spPr>
+          <a:xfrm>
+            <a:off x="8010144" y="1170432"/>
+            <a:ext cx="3456432" cy="1444752"/>
+          </a:xfrm>
+          <a:prstGeom prst="roundRect">
+            <a:avLst>
+              <a:gd name="adj" fmla="val 6000"/>
+            </a:avLst>
+          </a:prstGeom>
+          <a:solidFill>
+            <a:srgbClr val="FFFFFF"/>
+          </a:solidFill>
+          <a:ln w="9525">
+            <a:solidFill>
+              <a:srgbClr val="D7DDE8"/>
+            </a:solidFill>
+          </a:ln>
+        </p:spPr>
+        <p:style>
+          <a:lnRef idx="1">
+            <a:schemeClr val="accent1"/>
+          </a:lnRef>
+          <a:fillRef idx="3">
+            <a:schemeClr val="accent1"/>
+          </a:fillRef>
+          <a:effectRef idx="2">
+            <a:schemeClr val="accent1"/>
+          </a:effectRef>
+          <a:fontRef idx="minor">
+            <a:schemeClr val="lt1"/>
+          </a:fontRef>
+        </p:style>
+        <p:txBody>
+          <a:bodyPr rtlCol="0" anchor="ctr"/>
+          <a:lstStyle/>
+          <a:p>
+            <a:pPr algn="ctr"/>
+          </a:p>
+        </p:txBody>
+      </p:sp>
+      <p:pic>
+        <p:nvPicPr>
+          <p:cNvPr id="17" name="Picture 16" descr="shichirinpic_card.jpg"/>
+          <p:cNvPicPr>
+            <a:picLocks noChangeAspect="1"/>
+          </p:cNvPicPr>
+          <p:nvPr/>
+        </p:nvPicPr>
+        <p:blipFill>
+          <a:blip r:embed="rId4"/>
+          <a:srcRect t="8751" b="8751"/>
+          <a:stretch>
+            <a:fillRect/>
+          </a:stretch>
+        </p:blipFill>
+        <p:spPr>
+          <a:xfrm>
+            <a:off x="8083296" y="1243584"/>
+            <a:ext cx="3310128" cy="1298448"/>
+          </a:xfrm>
+          <a:prstGeom prst="rect">
+            <a:avLst/>
+          </a:prstGeom>
+        </p:spPr>
+      </p:pic>
+      <p:sp>
+        <p:nvSpPr>
+          <p:cNvPr id="18" name="Rounded Rectangle 17"/>
+          <p:cNvSpPr/>
+          <p:nvPr/>
+        </p:nvSpPr>
+        <p:spPr>
+          <a:xfrm>
+            <a:off x="8083296" y="1243584"/>
+            <a:ext cx="3310128" cy="1298448"/>
+          </a:xfrm>
+          <a:prstGeom prst="roundRect">
+            <a:avLst>
+              <a:gd name="adj" fmla="val 4000"/>
+            </a:avLst>
+          </a:prstGeom>
+          <a:noFill/>
+          <a:ln w="12700">
+            <a:solidFill>
+              <a:srgbClr val="FFFFFF"/>
+            </a:solidFill>
+          </a:ln>
+        </p:spPr>
+        <p:style>
+          <a:lnRef idx="1">
+            <a:schemeClr val="accent1"/>
+          </a:lnRef>
+          <a:fillRef idx="3">
+            <a:schemeClr val="accent1"/>
+          </a:fillRef>
+          <a:effectRef idx="2">
+            <a:schemeClr val="accent1"/>
+          </a:effectRef>
+          <a:fontRef idx="minor">
+            <a:schemeClr val="lt1"/>
+          </a:fontRef>
+        </p:style>
+        <p:txBody>
+          <a:bodyPr rtlCol="0" anchor="ctr"/>
+          <a:lstStyle/>
+          <a:p>
+            <a:pPr algn="ctr"/>
+          </a:p>
+        </p:txBody>
+      </p:sp>
+      <p:sp>
+        <p:nvSpPr>
+          <p:cNvPr id="19" name="Rounded Rectangle 18"/>
+          <p:cNvSpPr/>
+          <p:nvPr/>
+        </p:nvSpPr>
+        <p:spPr>
+          <a:xfrm>
+            <a:off x="8083296" y="2212848"/>
+            <a:ext cx="3310128" cy="329184"/>
+          </a:xfrm>
+          <a:prstGeom prst="roundRect">
+            <a:avLst>
+              <a:gd name="adj" fmla="val 6000"/>
+            </a:avLst>
+          </a:prstGeom>
+          <a:solidFill>
+            <a:srgbClr val="0A162A"/>
+          </a:solidFill>
+          <a:ln>
+            <a:noFill/>
+          </a:ln>
+        </p:spPr>
+        <p:style>
+          <a:lnRef idx="1">
+            <a:schemeClr val="accent1"/>
+          </a:lnRef>
+          <a:fillRef idx="3">
+            <a:schemeClr val="accent1"/>
+          </a:fillRef>
+          <a:effectRef idx="2">
+            <a:schemeClr val="accent1"/>
+          </a:effectRef>
+          <a:fontRef idx="minor">
+            <a:schemeClr val="lt1"/>
+          </a:fontRef>
+        </p:style>
+        <p:txBody>
+          <a:bodyPr rtlCol="0" anchor="ctr"/>
+          <a:lstStyle/>
+          <a:p>
+            <a:pPr algn="ctr"/>
+          </a:p>
+        </p:txBody>
+      </p:sp>
+      <p:sp>
+        <p:nvSpPr>
+          <p:cNvPr id="20" name="TextBox 19"/>
+          <p:cNvSpPr txBox="1"/>
+          <p:nvPr/>
+        </p:nvSpPr>
+        <p:spPr>
+          <a:xfrm>
+            <a:off x="8211312" y="2267712"/>
+            <a:ext cx="3054096" cy="219456"/>
           </a:xfrm>
           <a:prstGeom prst="rect">
             <a:avLst/>
@@ -4552,13 +4571,633 @@
       </p:sp>
       <p:sp>
         <p:nvSpPr>
-          <p:cNvPr id="19" name="TextBox 18"/>
+          <p:cNvPr id="21" name="Rounded Rectangle 20"/>
+          <p:cNvSpPr/>
+          <p:nvPr/>
+        </p:nvSpPr>
+        <p:spPr>
+          <a:xfrm>
+            <a:off x="658368" y="2926080"/>
+            <a:ext cx="10863072" cy="512064"/>
+          </a:xfrm>
+          <a:prstGeom prst="roundRect">
+            <a:avLst>
+              <a:gd name="adj" fmla="val 6000"/>
+            </a:avLst>
+          </a:prstGeom>
+          <a:solidFill>
+            <a:srgbClr val="FFFFFF"/>
+          </a:solidFill>
+          <a:ln w="9525">
+            <a:solidFill>
+              <a:srgbClr val="D7DDE8"/>
+            </a:solidFill>
+          </a:ln>
+        </p:spPr>
+        <p:style>
+          <a:lnRef idx="1">
+            <a:schemeClr val="accent1"/>
+          </a:lnRef>
+          <a:fillRef idx="3">
+            <a:schemeClr val="accent1"/>
+          </a:fillRef>
+          <a:effectRef idx="2">
+            <a:schemeClr val="accent1"/>
+          </a:effectRef>
+          <a:fontRef idx="minor">
+            <a:schemeClr val="lt1"/>
+          </a:fontRef>
+        </p:style>
+        <p:txBody>
+          <a:bodyPr rtlCol="0" anchor="ctr"/>
+          <a:lstStyle/>
+          <a:p>
+            <a:pPr algn="ctr"/>
+          </a:p>
+        </p:txBody>
+      </p:sp>
+      <p:sp>
+        <p:nvSpPr>
+          <p:cNvPr id="22" name="Oval 21"/>
+          <p:cNvSpPr/>
+          <p:nvPr/>
+        </p:nvSpPr>
+        <p:spPr>
+          <a:xfrm>
+            <a:off x="896112" y="3099816"/>
+            <a:ext cx="146304" cy="146304"/>
+          </a:xfrm>
+          <a:prstGeom prst="ellipse">
+            <a:avLst/>
+          </a:prstGeom>
+          <a:solidFill>
+            <a:srgbClr val="2E8FA3"/>
+          </a:solidFill>
+          <a:ln w="9525">
+            <a:solidFill>
+              <a:srgbClr val="2E8FA3"/>
+            </a:solidFill>
+          </a:ln>
+        </p:spPr>
+        <p:style>
+          <a:lnRef idx="1">
+            <a:schemeClr val="accent1"/>
+          </a:lnRef>
+          <a:fillRef idx="3">
+            <a:schemeClr val="accent1"/>
+          </a:fillRef>
+          <a:effectRef idx="2">
+            <a:schemeClr val="accent1"/>
+          </a:effectRef>
+          <a:fontRef idx="minor">
+            <a:schemeClr val="lt1"/>
+          </a:fontRef>
+        </p:style>
+        <p:txBody>
+          <a:bodyPr rtlCol="0" anchor="ctr"/>
+          <a:lstStyle/>
+          <a:p>
+            <a:pPr algn="ctr"/>
+          </a:p>
+        </p:txBody>
+      </p:sp>
+      <p:sp>
+        <p:nvSpPr>
+          <p:cNvPr id="23" name="TextBox 22"/>
           <p:cNvSpPr txBox="1"/>
           <p:nvPr/>
         </p:nvSpPr>
         <p:spPr>
           <a:xfrm>
-            <a:off x="658368" y="6236208"/>
+            <a:off x="1207008" y="3008376"/>
+            <a:ext cx="9966960" cy="365760"/>
+          </a:xfrm>
+          <a:prstGeom prst="rect">
+            <a:avLst/>
+          </a:prstGeom>
+          <a:noFill/>
+        </p:spPr>
+        <p:txBody>
+          <a:bodyPr wrap="square" anchor="ctr" lIns="0" rIns="0" tIns="0" bIns="0">
+            <a:spAutoFit/>
+          </a:bodyPr>
+          <a:lstStyle/>
+          <a:p>
+            <a:pPr algn="l">
+              <a:lnSpc>
+                <a:spcPct val="102000"/>
+              </a:lnSpc>
+            </a:pPr>
+            <a:r>
+              <a:rPr sz="1140" b="1">
+                <a:solidFill>
+                  <a:srgbClr val="1A1A1A"/>
+                </a:solidFill>
+                <a:latin typeface="Hiragino Sans"/>
+                <a:ea typeface="Hiragino Sans"/>
+                <a:cs typeface="Hiragino Sans"/>
+              </a:rPr>
+              <a:t>教室や校庭から相模湾と江の島を一望。晴れた日は遠くに伊豆大島も見える、海沿いの坂の上の学校</a:t>
+            </a:r>
+          </a:p>
+        </p:txBody>
+      </p:sp>
+      <p:sp>
+        <p:nvSpPr>
+          <p:cNvPr id="24" name="Rounded Rectangle 23"/>
+          <p:cNvSpPr/>
+          <p:nvPr/>
+        </p:nvSpPr>
+        <p:spPr>
+          <a:xfrm>
+            <a:off x="658368" y="3529584"/>
+            <a:ext cx="10863072" cy="512064"/>
+          </a:xfrm>
+          <a:prstGeom prst="roundRect">
+            <a:avLst>
+              <a:gd name="adj" fmla="val 6000"/>
+            </a:avLst>
+          </a:prstGeom>
+          <a:solidFill>
+            <a:srgbClr val="FFFFFF"/>
+          </a:solidFill>
+          <a:ln w="9525">
+            <a:solidFill>
+              <a:srgbClr val="D7DDE8"/>
+            </a:solidFill>
+          </a:ln>
+        </p:spPr>
+        <p:style>
+          <a:lnRef idx="1">
+            <a:schemeClr val="accent1"/>
+          </a:lnRef>
+          <a:fillRef idx="3">
+            <a:schemeClr val="accent1"/>
+          </a:fillRef>
+          <a:effectRef idx="2">
+            <a:schemeClr val="accent1"/>
+          </a:effectRef>
+          <a:fontRef idx="minor">
+            <a:schemeClr val="lt1"/>
+          </a:fontRef>
+        </p:style>
+        <p:txBody>
+          <a:bodyPr rtlCol="0" anchor="ctr"/>
+          <a:lstStyle/>
+          <a:p>
+            <a:pPr algn="ctr"/>
+          </a:p>
+        </p:txBody>
+      </p:sp>
+      <p:sp>
+        <p:nvSpPr>
+          <p:cNvPr id="25" name="Oval 24"/>
+          <p:cNvSpPr/>
+          <p:nvPr/>
+        </p:nvSpPr>
+        <p:spPr>
+          <a:xfrm>
+            <a:off x="896112" y="3703320"/>
+            <a:ext cx="146304" cy="146304"/>
+          </a:xfrm>
+          <a:prstGeom prst="ellipse">
+            <a:avLst/>
+          </a:prstGeom>
+          <a:solidFill>
+            <a:srgbClr val="2E8FA3"/>
+          </a:solidFill>
+          <a:ln w="9525">
+            <a:solidFill>
+              <a:srgbClr val="2E8FA3"/>
+            </a:solidFill>
+          </a:ln>
+        </p:spPr>
+        <p:style>
+          <a:lnRef idx="1">
+            <a:schemeClr val="accent1"/>
+          </a:lnRef>
+          <a:fillRef idx="3">
+            <a:schemeClr val="accent1"/>
+          </a:fillRef>
+          <a:effectRef idx="2">
+            <a:schemeClr val="accent1"/>
+          </a:effectRef>
+          <a:fontRef idx="minor">
+            <a:schemeClr val="lt1"/>
+          </a:fontRef>
+        </p:style>
+        <p:txBody>
+          <a:bodyPr rtlCol="0" anchor="ctr"/>
+          <a:lstStyle/>
+          <a:p>
+            <a:pPr algn="ctr"/>
+          </a:p>
+        </p:txBody>
+      </p:sp>
+      <p:sp>
+        <p:nvSpPr>
+          <p:cNvPr id="26" name="TextBox 25"/>
+          <p:cNvSpPr txBox="1"/>
+          <p:nvPr/>
+        </p:nvSpPr>
+        <p:spPr>
+          <a:xfrm>
+            <a:off x="1207008" y="3611880"/>
+            <a:ext cx="9966960" cy="365760"/>
+          </a:xfrm>
+          <a:prstGeom prst="rect">
+            <a:avLst/>
+          </a:prstGeom>
+          <a:noFill/>
+        </p:spPr>
+        <p:txBody>
+          <a:bodyPr wrap="square" anchor="ctr" lIns="0" rIns="0" tIns="0" bIns="0">
+            <a:spAutoFit/>
+          </a:bodyPr>
+          <a:lstStyle/>
+          <a:p>
+            <a:pPr algn="l">
+              <a:lnSpc>
+                <a:spcPct val="102000"/>
+              </a:lnSpc>
+            </a:pPr>
+            <a:r>
+              <a:rPr sz="1140" b="1">
+                <a:solidFill>
+                  <a:srgbClr val="1A1A1A"/>
+                </a:solidFill>
+                <a:latin typeface="Hiragino Sans"/>
+                <a:ea typeface="Hiragino Sans"/>
+                <a:cs typeface="Hiragino Sans"/>
+              </a:rPr>
+              <a:t>体育祭「七里ンピック」はペアダンスが名物。海風の中、全校が一体になって盛り上がる</a:t>
+            </a:r>
+          </a:p>
+        </p:txBody>
+      </p:sp>
+      <p:sp>
+        <p:nvSpPr>
+          <p:cNvPr id="27" name="Rounded Rectangle 26"/>
+          <p:cNvSpPr/>
+          <p:nvPr/>
+        </p:nvSpPr>
+        <p:spPr>
+          <a:xfrm>
+            <a:off x="658368" y="4133087"/>
+            <a:ext cx="10863072" cy="512064"/>
+          </a:xfrm>
+          <a:prstGeom prst="roundRect">
+            <a:avLst>
+              <a:gd name="adj" fmla="val 6000"/>
+            </a:avLst>
+          </a:prstGeom>
+          <a:solidFill>
+            <a:srgbClr val="FFFFFF"/>
+          </a:solidFill>
+          <a:ln w="9525">
+            <a:solidFill>
+              <a:srgbClr val="D7DDE8"/>
+            </a:solidFill>
+          </a:ln>
+        </p:spPr>
+        <p:style>
+          <a:lnRef idx="1">
+            <a:schemeClr val="accent1"/>
+          </a:lnRef>
+          <a:fillRef idx="3">
+            <a:schemeClr val="accent1"/>
+          </a:fillRef>
+          <a:effectRef idx="2">
+            <a:schemeClr val="accent1"/>
+          </a:effectRef>
+          <a:fontRef idx="minor">
+            <a:schemeClr val="lt1"/>
+          </a:fontRef>
+        </p:style>
+        <p:txBody>
+          <a:bodyPr rtlCol="0" anchor="ctr"/>
+          <a:lstStyle/>
+          <a:p>
+            <a:pPr algn="ctr"/>
+          </a:p>
+        </p:txBody>
+      </p:sp>
+      <p:sp>
+        <p:nvSpPr>
+          <p:cNvPr id="28" name="Oval 27"/>
+          <p:cNvSpPr/>
+          <p:nvPr/>
+        </p:nvSpPr>
+        <p:spPr>
+          <a:xfrm>
+            <a:off x="896112" y="4306823"/>
+            <a:ext cx="146304" cy="146304"/>
+          </a:xfrm>
+          <a:prstGeom prst="ellipse">
+            <a:avLst/>
+          </a:prstGeom>
+          <a:solidFill>
+            <a:srgbClr val="2E8FA3"/>
+          </a:solidFill>
+          <a:ln w="9525">
+            <a:solidFill>
+              <a:srgbClr val="2E8FA3"/>
+            </a:solidFill>
+          </a:ln>
+        </p:spPr>
+        <p:style>
+          <a:lnRef idx="1">
+            <a:schemeClr val="accent1"/>
+          </a:lnRef>
+          <a:fillRef idx="3">
+            <a:schemeClr val="accent1"/>
+          </a:fillRef>
+          <a:effectRef idx="2">
+            <a:schemeClr val="accent1"/>
+          </a:effectRef>
+          <a:fontRef idx="minor">
+            <a:schemeClr val="lt1"/>
+          </a:fontRef>
+        </p:style>
+        <p:txBody>
+          <a:bodyPr rtlCol="0" anchor="ctr"/>
+          <a:lstStyle/>
+          <a:p>
+            <a:pPr algn="ctr"/>
+          </a:p>
+        </p:txBody>
+      </p:sp>
+      <p:sp>
+        <p:nvSpPr>
+          <p:cNvPr id="29" name="TextBox 28"/>
+          <p:cNvSpPr txBox="1"/>
+          <p:nvPr/>
+        </p:nvSpPr>
+        <p:spPr>
+          <a:xfrm>
+            <a:off x="1207008" y="4215383"/>
+            <a:ext cx="9966960" cy="365760"/>
+          </a:xfrm>
+          <a:prstGeom prst="rect">
+            <a:avLst/>
+          </a:prstGeom>
+          <a:noFill/>
+        </p:spPr>
+        <p:txBody>
+          <a:bodyPr wrap="square" anchor="ctr" lIns="0" rIns="0" tIns="0" bIns="0">
+            <a:spAutoFit/>
+          </a:bodyPr>
+          <a:lstStyle/>
+          <a:p>
+            <a:pPr algn="l">
+              <a:lnSpc>
+                <a:spcPct val="102000"/>
+              </a:lnSpc>
+            </a:pPr>
+            <a:r>
+              <a:rPr sz="1140" b="1">
+                <a:solidFill>
+                  <a:srgbClr val="1A1A1A"/>
+                </a:solidFill>
+                <a:latin typeface="Hiragino Sans"/>
+                <a:ea typeface="Hiragino Sans"/>
+                <a:cs typeface="Hiragino Sans"/>
+              </a:rPr>
+              <a:t>校訓は「自学自習・自主自律」。自分で考えて動く、のびのびした自由な空気</a:t>
+            </a:r>
+          </a:p>
+        </p:txBody>
+      </p:sp>
+      <p:sp>
+        <p:nvSpPr>
+          <p:cNvPr id="30" name="Rounded Rectangle 29"/>
+          <p:cNvSpPr/>
+          <p:nvPr/>
+        </p:nvSpPr>
+        <p:spPr>
+          <a:xfrm>
+            <a:off x="658368" y="4736592"/>
+            <a:ext cx="10863072" cy="512064"/>
+          </a:xfrm>
+          <a:prstGeom prst="roundRect">
+            <a:avLst>
+              <a:gd name="adj" fmla="val 6000"/>
+            </a:avLst>
+          </a:prstGeom>
+          <a:solidFill>
+            <a:srgbClr val="FFFFFF"/>
+          </a:solidFill>
+          <a:ln w="9525">
+            <a:solidFill>
+              <a:srgbClr val="D7DDE8"/>
+            </a:solidFill>
+          </a:ln>
+        </p:spPr>
+        <p:style>
+          <a:lnRef idx="1">
+            <a:schemeClr val="accent1"/>
+          </a:lnRef>
+          <a:fillRef idx="3">
+            <a:schemeClr val="accent1"/>
+          </a:fillRef>
+          <a:effectRef idx="2">
+            <a:schemeClr val="accent1"/>
+          </a:effectRef>
+          <a:fontRef idx="minor">
+            <a:schemeClr val="lt1"/>
+          </a:fontRef>
+        </p:style>
+        <p:txBody>
+          <a:bodyPr rtlCol="0" anchor="ctr"/>
+          <a:lstStyle/>
+          <a:p>
+            <a:pPr algn="ctr"/>
+          </a:p>
+        </p:txBody>
+      </p:sp>
+      <p:sp>
+        <p:nvSpPr>
+          <p:cNvPr id="31" name="Oval 30"/>
+          <p:cNvSpPr/>
+          <p:nvPr/>
+        </p:nvSpPr>
+        <p:spPr>
+          <a:xfrm>
+            <a:off x="896112" y="4910328"/>
+            <a:ext cx="146304" cy="146304"/>
+          </a:xfrm>
+          <a:prstGeom prst="ellipse">
+            <a:avLst/>
+          </a:prstGeom>
+          <a:solidFill>
+            <a:srgbClr val="2E8FA3"/>
+          </a:solidFill>
+          <a:ln w="9525">
+            <a:solidFill>
+              <a:srgbClr val="2E8FA3"/>
+            </a:solidFill>
+          </a:ln>
+        </p:spPr>
+        <p:style>
+          <a:lnRef idx="1">
+            <a:schemeClr val="accent1"/>
+          </a:lnRef>
+          <a:fillRef idx="3">
+            <a:schemeClr val="accent1"/>
+          </a:fillRef>
+          <a:effectRef idx="2">
+            <a:schemeClr val="accent1"/>
+          </a:effectRef>
+          <a:fontRef idx="minor">
+            <a:schemeClr val="lt1"/>
+          </a:fontRef>
+        </p:style>
+        <p:txBody>
+          <a:bodyPr rtlCol="0" anchor="ctr"/>
+          <a:lstStyle/>
+          <a:p>
+            <a:pPr algn="ctr"/>
+          </a:p>
+        </p:txBody>
+      </p:sp>
+      <p:sp>
+        <p:nvSpPr>
+          <p:cNvPr id="32" name="TextBox 31"/>
+          <p:cNvSpPr txBox="1"/>
+          <p:nvPr/>
+        </p:nvSpPr>
+        <p:spPr>
+          <a:xfrm>
+            <a:off x="1207008" y="4818888"/>
+            <a:ext cx="9966960" cy="365760"/>
+          </a:xfrm>
+          <a:prstGeom prst="rect">
+            <a:avLst/>
+          </a:prstGeom>
+          <a:noFill/>
+        </p:spPr>
+        <p:txBody>
+          <a:bodyPr wrap="square" anchor="ctr" lIns="0" rIns="0" tIns="0" bIns="0">
+            <a:spAutoFit/>
+          </a:bodyPr>
+          <a:lstStyle/>
+          <a:p>
+            <a:pPr algn="l">
+              <a:lnSpc>
+                <a:spcPct val="102000"/>
+              </a:lnSpc>
+            </a:pPr>
+            <a:r>
+              <a:rPr sz="1140" b="1">
+                <a:solidFill>
+                  <a:srgbClr val="1A1A1A"/>
+                </a:solidFill>
+                <a:latin typeface="Hiragino Sans"/>
+                <a:ea typeface="Hiragino Sans"/>
+                <a:cs typeface="Hiragino Sans"/>
+              </a:rPr>
+              <a:t>江ノ電の駅から徒歩すぐ、目の前は七里ヶ浜の海岸。通学路がもう湘南</a:t>
+            </a:r>
+          </a:p>
+        </p:txBody>
+      </p:sp>
+      <p:sp>
+        <p:nvSpPr>
+          <p:cNvPr id="33" name="Rounded Rectangle 32"/>
+          <p:cNvSpPr/>
+          <p:nvPr/>
+        </p:nvSpPr>
+        <p:spPr>
+          <a:xfrm>
+            <a:off x="658368" y="5559552"/>
+            <a:ext cx="6217920" cy="420624"/>
+          </a:xfrm>
+          <a:prstGeom prst="roundRect">
+            <a:avLst>
+              <a:gd name="adj" fmla="val 6000"/>
+            </a:avLst>
+          </a:prstGeom>
+          <a:solidFill>
+            <a:srgbClr val="FFFFFF"/>
+          </a:solidFill>
+          <a:ln w="9525">
+            <a:solidFill>
+              <a:srgbClr val="D7DDE8"/>
+            </a:solidFill>
+          </a:ln>
+        </p:spPr>
+        <p:style>
+          <a:lnRef idx="1">
+            <a:schemeClr val="accent1"/>
+          </a:lnRef>
+          <a:fillRef idx="3">
+            <a:schemeClr val="accent1"/>
+          </a:fillRef>
+          <a:effectRef idx="2">
+            <a:schemeClr val="accent1"/>
+          </a:effectRef>
+          <a:fontRef idx="minor">
+            <a:schemeClr val="lt1"/>
+          </a:fontRef>
+        </p:style>
+        <p:txBody>
+          <a:bodyPr rtlCol="0" anchor="ctr"/>
+          <a:lstStyle/>
+          <a:p>
+            <a:pPr algn="ctr"/>
+          </a:p>
+        </p:txBody>
+      </p:sp>
+      <p:sp>
+        <p:nvSpPr>
+          <p:cNvPr id="34" name="TextBox 33"/>
+          <p:cNvSpPr txBox="1"/>
+          <p:nvPr/>
+        </p:nvSpPr>
+        <p:spPr>
+          <a:xfrm>
+            <a:off x="932688" y="5687568"/>
+            <a:ext cx="5669280" cy="182880"/>
+          </a:xfrm>
+          <a:prstGeom prst="rect">
+            <a:avLst/>
+          </a:prstGeom>
+          <a:noFill/>
+        </p:spPr>
+        <p:txBody>
+          <a:bodyPr wrap="square" anchor="ctr" lIns="0" rIns="0" tIns="0" bIns="0">
+            <a:spAutoFit/>
+          </a:bodyPr>
+          <a:lstStyle/>
+          <a:p>
+            <a:pPr algn="l">
+              <a:lnSpc>
+                <a:spcPct val="115000"/>
+              </a:lnSpc>
+            </a:pPr>
+            <a:r>
+              <a:rPr sz="1300" b="1">
+                <a:solidFill>
+                  <a:srgbClr val="1E6575"/>
+                </a:solidFill>
+                <a:latin typeface="Hiragino Sans"/>
+                <a:ea typeface="Hiragino Sans"/>
+                <a:cs typeface="Hiragino Sans"/>
+              </a:rPr>
+              <a:t>江ノ電「七里ヶ浜」駅から徒歩すぐ</a:t>
+            </a:r>
+          </a:p>
+        </p:txBody>
+      </p:sp>
+      <p:sp>
+        <p:nvSpPr>
+          <p:cNvPr id="35" name="TextBox 34"/>
+          <p:cNvSpPr txBox="1"/>
+          <p:nvPr/>
+        </p:nvSpPr>
+        <p:spPr>
+          <a:xfrm>
+            <a:off x="658368" y="6327648"/>
             <a:ext cx="9875520" cy="201168"/>
           </a:xfrm>
           <a:prstGeom prst="rect">
